--- a/Cridora_Business_Proposal.pptx
+++ b/Cridora_Business_Proposal.pptx
@@ -5,7 +5,7 @@
     <p:sldMasterId id="2147483648" r:id="rId1"/>
   </p:sldMasterIdLst>
   <p:notesMasterIdLst>
-    <p:notesMasterId r:id="rId16"/>
+    <p:notesMasterId r:id="rId15"/>
   </p:notesMasterIdLst>
   <p:sldIdLst>
     <p:sldId id="256" r:id="rId2"/>
@@ -19,9 +19,8 @@
     <p:sldId id="264" r:id="rId10"/>
     <p:sldId id="265" r:id="rId11"/>
     <p:sldId id="266" r:id="rId12"/>
-    <p:sldId id="267" r:id="rId13"/>
-    <p:sldId id="268" r:id="rId14"/>
-    <p:sldId id="269" r:id="rId15"/>
+    <p:sldId id="268" r:id="rId13"/>
+    <p:sldId id="269" r:id="rId14"/>
   </p:sldIdLst>
   <p:sldSz cx="12192000" cy="6858000"/>
   <p:notesSz cx="6858000" cy="12192000"/>
@@ -652,90 +651,6 @@
             <a:fld id="{F7021451-1387-4CA6-816F-3879F97B5CBC}" type="slidenum">
               <a:rPr lang="en-US"/>
               <a:t>13</a:t>
-            </a:fld>
-            <a:endParaRPr lang="en-US"/>
-          </a:p>
-        </p:txBody>
-      </p:sp>
-    </p:spTree>
-    <p:extLst>
-      <p:ext uri="{BB962C8B-B14F-4D97-AF65-F5344CB8AC3E}">
-        <p14:creationId xmlns:p14="http://schemas.microsoft.com/office/powerpoint/2010/main" val="1024086991"/>
-      </p:ext>
-    </p:extLst>
-  </p:cSld>
-  <p:clrMapOvr>
-    <a:masterClrMapping/>
-  </p:clrMapOvr>
-</p:notes>
-</file>
-
-<file path=ppt/notesSlides/notesSlide14.xml><?xml version="1.0" encoding="utf-8"?>
-<p:notes xmlns:a="http://schemas.openxmlformats.org/drawingml/2006/main" xmlns:r="http://schemas.openxmlformats.org/officeDocument/2006/relationships" xmlns:p="http://schemas.openxmlformats.org/presentationml/2006/main">
-  <p:cSld>
-    <p:spTree>
-      <p:nvGrpSpPr>
-        <p:cNvPr id="1" name=""/>
-        <p:cNvGrpSpPr/>
-        <p:nvPr/>
-      </p:nvGrpSpPr>
-      <p:grpSpPr>
-        <a:xfrm>
-          <a:off x="0" y="0"/>
-          <a:ext cx="0" cy="0"/>
-          <a:chOff x="0" y="0"/>
-          <a:chExt cx="0" cy="0"/>
-        </a:xfrm>
-      </p:grpSpPr>
-      <p:sp>
-        <p:nvSpPr>
-          <p:cNvPr id="2" name="Slide Image Placeholder 1"/>
-          <p:cNvSpPr>
-            <a:spLocks noGrp="1" noRot="1" noChangeAspect="1"/>
-          </p:cNvSpPr>
-          <p:nvPr>
-            <p:ph type="sldImg"/>
-          </p:nvPr>
-        </p:nvSpPr>
-        <p:spPr/>
-      </p:sp>
-      <p:sp>
-        <p:nvSpPr>
-          <p:cNvPr id="3" name="Notes Placeholder 2"/>
-          <p:cNvSpPr>
-            <a:spLocks noGrp="1"/>
-          </p:cNvSpPr>
-          <p:nvPr>
-            <p:ph type="body" idx="1"/>
-          </p:nvPr>
-        </p:nvSpPr>
-        <p:spPr/>
-        <p:txBody>
-          <a:bodyPr/>
-          <a:lstStyle/>
-          <a:p>
-            <a:endParaRPr lang="en-US" dirty="0"/>
-          </a:p>
-        </p:txBody>
-      </p:sp>
-      <p:sp>
-        <p:nvSpPr>
-          <p:cNvPr id="4" name="Slide Number Placeholder 3"/>
-          <p:cNvSpPr>
-            <a:spLocks noGrp="1"/>
-          </p:cNvSpPr>
-          <p:nvPr>
-            <p:ph type="sldNum" sz="quarter" idx="10"/>
-          </p:nvPr>
-        </p:nvSpPr>
-        <p:spPr/>
-        <p:txBody>
-          <a:bodyPr/>
-          <a:lstStyle/>
-          <a:p>
-            <a:fld id="{F7021451-1387-4CA6-816F-3879F97B5CBC}" type="slidenum">
-              <a:rPr lang="en-US"/>
-              <a:t>14</a:t>
             </a:fld>
             <a:endParaRPr lang="en-US"/>
           </a:p>
@@ -2048,6 +1963,66 @@
           </a:p>
         </p:txBody>
       </p:sp>
+      <p:pic>
+        <p:nvPicPr>
+          <p:cNvPr id="14" name="Picture 13">
+            <a:extLst>
+              <a:ext uri="{FF2B5EF4-FFF2-40B4-BE49-F238E27FC236}">
+                <a16:creationId xmlns:a16="http://schemas.microsoft.com/office/drawing/2014/main" id="{C66B6142-A653-409E-669E-0DDCAF90F13B}"/>
+              </a:ext>
+            </a:extLst>
+          </p:cNvPr>
+          <p:cNvPicPr>
+            <a:picLocks noChangeAspect="1"/>
+          </p:cNvPicPr>
+          <p:nvPr/>
+        </p:nvPicPr>
+        <p:blipFill>
+          <a:blip r:embed="rId3"/>
+          <a:stretch>
+            <a:fillRect/>
+          </a:stretch>
+        </p:blipFill>
+        <p:spPr>
+          <a:xfrm>
+            <a:off x="11001160" y="-103155"/>
+            <a:ext cx="1300501" cy="1300501"/>
+          </a:xfrm>
+          <a:prstGeom prst="rect">
+            <a:avLst/>
+          </a:prstGeom>
+        </p:spPr>
+      </p:pic>
+      <p:pic>
+        <p:nvPicPr>
+          <p:cNvPr id="16" name="Picture 15">
+            <a:extLst>
+              <a:ext uri="{FF2B5EF4-FFF2-40B4-BE49-F238E27FC236}">
+                <a16:creationId xmlns:a16="http://schemas.microsoft.com/office/drawing/2014/main" id="{C87AA25C-C93F-C261-5FA6-BDBA6F38A910}"/>
+              </a:ext>
+            </a:extLst>
+          </p:cNvPr>
+          <p:cNvPicPr>
+            <a:picLocks noChangeAspect="1"/>
+          </p:cNvPicPr>
+          <p:nvPr/>
+        </p:nvPicPr>
+        <p:blipFill>
+          <a:blip r:embed="rId3"/>
+          <a:stretch>
+            <a:fillRect/>
+          </a:stretch>
+        </p:blipFill>
+        <p:spPr>
+          <a:xfrm>
+            <a:off x="9550394" y="4063994"/>
+            <a:ext cx="3210571" cy="3210571"/>
+          </a:xfrm>
+          <a:prstGeom prst="rect">
+            <a:avLst/>
+          </a:prstGeom>
+        </p:spPr>
+      </p:pic>
     </p:spTree>
   </p:cSld>
   <p:clrMapOvr>
@@ -2608,7 +2583,7 @@
                 <a:ea typeface="Georgia" pitchFamily="34" charset="-122"/>
                 <a:cs typeface="Georgia" pitchFamily="34" charset="-120"/>
               </a:rPr>
-              <a:t>5.00%</a:t>
+              <a:t>10.00%</a:t>
             </a:r>
             <a:endParaRPr lang="en-US" sz="4000" dirty="0"/>
           </a:p>
@@ -2815,6 +2790,36 @@
           </a:p>
         </p:txBody>
       </p:sp>
+      <p:pic>
+        <p:nvPicPr>
+          <p:cNvPr id="24" name="Picture 23">
+            <a:extLst>
+              <a:ext uri="{FF2B5EF4-FFF2-40B4-BE49-F238E27FC236}">
+                <a16:creationId xmlns:a16="http://schemas.microsoft.com/office/drawing/2014/main" id="{C7F54823-C770-CDEF-C1F0-1B91D9AE0E2D}"/>
+              </a:ext>
+            </a:extLst>
+          </p:cNvPr>
+          <p:cNvPicPr>
+            <a:picLocks noChangeAspect="1"/>
+          </p:cNvPicPr>
+          <p:nvPr/>
+        </p:nvPicPr>
+        <p:blipFill>
+          <a:blip r:embed="rId3"/>
+          <a:stretch>
+            <a:fillRect/>
+          </a:stretch>
+        </p:blipFill>
+        <p:spPr>
+          <a:xfrm>
+            <a:off x="11131035" y="-3462"/>
+            <a:ext cx="1060965" cy="1060965"/>
+          </a:xfrm>
+          <a:prstGeom prst="rect">
+            <a:avLst/>
+          </a:prstGeom>
+        </p:spPr>
+      </p:pic>
     </p:spTree>
   </p:cSld>
   <p:clrMapOvr>
@@ -3841,6 +3846,36 @@
           </a:p>
         </p:txBody>
       </p:sp>
+      <p:pic>
+        <p:nvPicPr>
+          <p:cNvPr id="32" name="Picture 31">
+            <a:extLst>
+              <a:ext uri="{FF2B5EF4-FFF2-40B4-BE49-F238E27FC236}">
+                <a16:creationId xmlns:a16="http://schemas.microsoft.com/office/drawing/2014/main" id="{3EA89E3F-FCB1-A7D1-5BB6-565A98E6E1CE}"/>
+              </a:ext>
+            </a:extLst>
+          </p:cNvPr>
+          <p:cNvPicPr>
+            <a:picLocks noChangeAspect="1"/>
+          </p:cNvPicPr>
+          <p:nvPr/>
+        </p:nvPicPr>
+        <p:blipFill>
+          <a:blip r:embed="rId6"/>
+          <a:stretch>
+            <a:fillRect/>
+          </a:stretch>
+        </p:blipFill>
+        <p:spPr>
+          <a:xfrm>
+            <a:off x="11131035" y="-3462"/>
+            <a:ext cx="1060965" cy="1060965"/>
+          </a:xfrm>
+          <a:prstGeom prst="rect">
+            <a:avLst/>
+          </a:prstGeom>
+        </p:spPr>
+      </p:pic>
     </p:spTree>
   </p:cSld>
   <p:clrMapOvr>
@@ -3850,820 +3885,6 @@
 </file>
 
 <file path=ppt/slides/slide12.xml><?xml version="1.0" encoding="utf-8"?>
-<p:sld xmlns:a="http://schemas.openxmlformats.org/drawingml/2006/main" xmlns:r="http://schemas.openxmlformats.org/officeDocument/2006/relationships" xmlns:p="http://schemas.openxmlformats.org/presentationml/2006/main">
-  <p:cSld name="Slide 12">
-    <p:bg>
-      <p:bgPr>
-        <a:solidFill>
-          <a:srgbClr val="F6F2E9"/>
-        </a:solidFill>
-        <a:effectLst/>
-      </p:bgPr>
-    </p:bg>
-    <p:spTree>
-      <p:nvGrpSpPr>
-        <p:cNvPr id="1" name=""/>
-        <p:cNvGrpSpPr/>
-        <p:nvPr/>
-      </p:nvGrpSpPr>
-      <p:grpSpPr>
-        <a:xfrm>
-          <a:off x="0" y="0"/>
-          <a:ext cx="0" cy="0"/>
-          <a:chOff x="0" y="0"/>
-          <a:chExt cx="0" cy="0"/>
-        </a:xfrm>
-      </p:grpSpPr>
-      <p:sp>
-        <p:nvSpPr>
-          <p:cNvPr id="2" name="Text 0"/>
-          <p:cNvSpPr/>
-          <p:nvPr/>
-        </p:nvSpPr>
-        <p:spPr>
-          <a:xfrm>
-            <a:off x="640080" y="457200"/>
-            <a:ext cx="5486400" cy="320040"/>
-          </a:xfrm>
-          <a:prstGeom prst="rect">
-            <a:avLst/>
-          </a:prstGeom>
-          <a:noFill/>
-          <a:ln/>
-        </p:spPr>
-        <p:txBody>
-          <a:bodyPr wrap="square" lIns="0" tIns="0" rIns="0" bIns="0" rtlCol="0" anchor="ctr"/>
-          <a:lstStyle/>
-          <a:p>
-            <a:pPr marL="0" indent="0">
-              <a:buNone/>
-            </a:pPr>
-            <a:r>
-              <a:rPr lang="en-US" sz="1200" b="1" kern="0" spc="300" dirty="0">
-                <a:solidFill>
-                  <a:srgbClr val="C9A84C"/>
-                </a:solidFill>
-                <a:latin typeface="Calibri" pitchFamily="34" charset="0"/>
-                <a:ea typeface="Calibri" pitchFamily="34" charset="-122"/>
-                <a:cs typeface="Calibri" pitchFamily="34" charset="-120"/>
-              </a:rPr>
-              <a:t>TECHNOLOGY</a:t>
-            </a:r>
-            <a:endParaRPr lang="en-US" sz="1200" dirty="0"/>
-          </a:p>
-        </p:txBody>
-      </p:sp>
-      <p:sp>
-        <p:nvSpPr>
-          <p:cNvPr id="3" name="Text 1"/>
-          <p:cNvSpPr/>
-          <p:nvPr/>
-        </p:nvSpPr>
-        <p:spPr>
-          <a:xfrm>
-            <a:off x="640080" y="777240"/>
-            <a:ext cx="10515600" cy="1188720"/>
-          </a:xfrm>
-          <a:prstGeom prst="rect">
-            <a:avLst/>
-          </a:prstGeom>
-          <a:noFill/>
-          <a:ln/>
-        </p:spPr>
-        <p:txBody>
-          <a:bodyPr wrap="square" lIns="0" tIns="0" rIns="0" bIns="0" rtlCol="0" anchor="ctr"/>
-          <a:lstStyle/>
-          <a:p>
-            <a:pPr marL="0" indent="0">
-              <a:buNone/>
-            </a:pPr>
-            <a:r>
-              <a:rPr lang="en-US" sz="2800" b="1" dirty="0">
-                <a:solidFill>
-                  <a:srgbClr val="0B0B0C"/>
-                </a:solidFill>
-                <a:latin typeface="Georgia" pitchFamily="34" charset="0"/>
-                <a:ea typeface="Georgia" pitchFamily="34" charset="-122"/>
-                <a:cs typeface="Georgia" pitchFamily="34" charset="-120"/>
-              </a:rPr>
-              <a:t>Built for scale, security,</a:t>
-            </a:r>
-            <a:endParaRPr lang="en-US" sz="2800" dirty="0"/>
-          </a:p>
-          <a:p>
-            <a:pPr marL="0" indent="0">
-              <a:buNone/>
-            </a:pPr>
-            <a:r>
-              <a:rPr lang="en-US" sz="2800" b="1" dirty="0">
-                <a:solidFill>
-                  <a:srgbClr val="0B0B0C"/>
-                </a:solidFill>
-                <a:latin typeface="Georgia" pitchFamily="34" charset="0"/>
-                <a:ea typeface="Georgia" pitchFamily="34" charset="-122"/>
-                <a:cs typeface="Georgia" pitchFamily="34" charset="-120"/>
-              </a:rPr>
-              <a:t>and compliance from day one.</a:t>
-            </a:r>
-            <a:endParaRPr lang="en-US" sz="2800" dirty="0"/>
-          </a:p>
-        </p:txBody>
-      </p:sp>
-      <p:sp>
-        <p:nvSpPr>
-          <p:cNvPr id="4" name="Shape 2"/>
-          <p:cNvSpPr/>
-          <p:nvPr/>
-        </p:nvSpPr>
-        <p:spPr>
-          <a:xfrm>
-            <a:off x="640080" y="2331720"/>
-            <a:ext cx="2542032" cy="2834640"/>
-          </a:xfrm>
-          <a:prstGeom prst="rect">
-            <a:avLst/>
-          </a:prstGeom>
-          <a:solidFill>
-            <a:srgbClr val="FFFFFF"/>
-          </a:solidFill>
-          <a:ln/>
-          <a:effectLst>
-            <a:outerShdw blurRad="88900" dist="25400" dir="8100000" algn="bl" rotWithShape="0">
-              <a:srgbClr val="000000">
-                <a:alpha val="10000"/>
-              </a:srgbClr>
-            </a:outerShdw>
-          </a:effectLst>
-        </p:spPr>
-      </p:sp>
-      <p:sp>
-        <p:nvSpPr>
-          <p:cNvPr id="5" name="Shape 3"/>
-          <p:cNvSpPr/>
-          <p:nvPr/>
-        </p:nvSpPr>
-        <p:spPr>
-          <a:xfrm>
-            <a:off x="896112" y="2606040"/>
-            <a:ext cx="502920" cy="502920"/>
-          </a:xfrm>
-          <a:prstGeom prst="ellipse">
-            <a:avLst/>
-          </a:prstGeom>
-          <a:solidFill>
-            <a:srgbClr val="0B0B0C"/>
-          </a:solidFill>
-          <a:ln/>
-        </p:spPr>
-      </p:sp>
-      <p:pic>
-        <p:nvPicPr>
-          <p:cNvPr id="6" name="Image 0" descr="preencoded.png"/>
-          <p:cNvPicPr>
-            <a:picLocks noChangeAspect="1"/>
-          </p:cNvPicPr>
-          <p:nvPr/>
-        </p:nvPicPr>
-        <p:blipFill>
-          <a:blip r:embed="rId3"/>
-          <a:stretch>
-            <a:fillRect/>
-          </a:stretch>
-        </p:blipFill>
-        <p:spPr>
-          <a:xfrm>
-            <a:off x="1005840" y="2715768"/>
-            <a:ext cx="283464" cy="283464"/>
-          </a:xfrm>
-          <a:prstGeom prst="rect">
-            <a:avLst/>
-          </a:prstGeom>
-        </p:spPr>
-      </p:pic>
-      <p:sp>
-        <p:nvSpPr>
-          <p:cNvPr id="7" name="Text 4"/>
-          <p:cNvSpPr/>
-          <p:nvPr/>
-        </p:nvSpPr>
-        <p:spPr>
-          <a:xfrm>
-            <a:off x="896112" y="3291840"/>
-            <a:ext cx="2029968" cy="365760"/>
-          </a:xfrm>
-          <a:prstGeom prst="rect">
-            <a:avLst/>
-          </a:prstGeom>
-          <a:noFill/>
-          <a:ln/>
-        </p:spPr>
-        <p:txBody>
-          <a:bodyPr wrap="square" lIns="0" tIns="0" rIns="0" bIns="0" rtlCol="0" anchor="ctr"/>
-          <a:lstStyle/>
-          <a:p>
-            <a:pPr marL="0" indent="0">
-              <a:buNone/>
-            </a:pPr>
-            <a:r>
-              <a:rPr lang="en-US" sz="1450" b="1" dirty="0">
-                <a:solidFill>
-                  <a:srgbClr val="0B0B0C"/>
-                </a:solidFill>
-                <a:latin typeface="Georgia" pitchFamily="34" charset="0"/>
-                <a:ea typeface="Georgia" pitchFamily="34" charset="-122"/>
-                <a:cs typeface="Georgia" pitchFamily="34" charset="-120"/>
-              </a:rPr>
-              <a:t>Backend</a:t>
-            </a:r>
-            <a:endParaRPr lang="en-US" sz="1450" dirty="0"/>
-          </a:p>
-        </p:txBody>
-      </p:sp>
-      <p:sp>
-        <p:nvSpPr>
-          <p:cNvPr id="8" name="Text 5"/>
-          <p:cNvSpPr/>
-          <p:nvPr/>
-        </p:nvSpPr>
-        <p:spPr>
-          <a:xfrm>
-            <a:off x="896112" y="3703320"/>
-            <a:ext cx="2029968" cy="1280160"/>
-          </a:xfrm>
-          <a:prstGeom prst="rect">
-            <a:avLst/>
-          </a:prstGeom>
-          <a:noFill/>
-          <a:ln/>
-        </p:spPr>
-        <p:txBody>
-          <a:bodyPr wrap="square" lIns="0" tIns="0" rIns="0" bIns="0" rtlCol="0" anchor="ctr"/>
-          <a:lstStyle/>
-          <a:p>
-            <a:pPr marL="0" indent="0">
-              <a:lnSpc>
-                <a:spcPct val="120000"/>
-              </a:lnSpc>
-              <a:buNone/>
-            </a:pPr>
-            <a:r>
-              <a:rPr lang="en-US" sz="1050" dirty="0">
-                <a:solidFill>
-                  <a:srgbClr val="6B6862"/>
-                </a:solidFill>
-                <a:latin typeface="Calibri" pitchFamily="34" charset="0"/>
-                <a:ea typeface="Calibri" pitchFamily="34" charset="-122"/>
-                <a:cs typeface="Calibri" pitchFamily="34" charset="-120"/>
-              </a:rPr>
-              <a:t>Django REST Framework, JWT authentication, PostgreSQL database.</a:t>
-            </a:r>
-            <a:endParaRPr lang="en-US" sz="1050" dirty="0"/>
-          </a:p>
-        </p:txBody>
-      </p:sp>
-      <p:sp>
-        <p:nvSpPr>
-          <p:cNvPr id="9" name="Shape 6"/>
-          <p:cNvSpPr/>
-          <p:nvPr/>
-        </p:nvSpPr>
-        <p:spPr>
-          <a:xfrm>
-            <a:off x="3410712" y="2331720"/>
-            <a:ext cx="2542032" cy="2834640"/>
-          </a:xfrm>
-          <a:prstGeom prst="rect">
-            <a:avLst/>
-          </a:prstGeom>
-          <a:solidFill>
-            <a:srgbClr val="FFFFFF"/>
-          </a:solidFill>
-          <a:ln/>
-          <a:effectLst>
-            <a:outerShdw blurRad="88900" dist="25400" dir="8100000" algn="bl" rotWithShape="0">
-              <a:srgbClr val="000000">
-                <a:alpha val="10000"/>
-              </a:srgbClr>
-            </a:outerShdw>
-          </a:effectLst>
-        </p:spPr>
-      </p:sp>
-      <p:sp>
-        <p:nvSpPr>
-          <p:cNvPr id="10" name="Shape 7"/>
-          <p:cNvSpPr/>
-          <p:nvPr/>
-        </p:nvSpPr>
-        <p:spPr>
-          <a:xfrm>
-            <a:off x="3666744" y="2606040"/>
-            <a:ext cx="502920" cy="502920"/>
-          </a:xfrm>
-          <a:prstGeom prst="ellipse">
-            <a:avLst/>
-          </a:prstGeom>
-          <a:solidFill>
-            <a:srgbClr val="0B0B0C"/>
-          </a:solidFill>
-          <a:ln/>
-        </p:spPr>
-      </p:sp>
-      <p:pic>
-        <p:nvPicPr>
-          <p:cNvPr id="11" name="Image 1" descr="preencoded.png"/>
-          <p:cNvPicPr>
-            <a:picLocks noChangeAspect="1"/>
-          </p:cNvPicPr>
-          <p:nvPr/>
-        </p:nvPicPr>
-        <p:blipFill>
-          <a:blip r:embed="rId4"/>
-          <a:stretch>
-            <a:fillRect/>
-          </a:stretch>
-        </p:blipFill>
-        <p:spPr>
-          <a:xfrm>
-            <a:off x="3776472" y="2715768"/>
-            <a:ext cx="283464" cy="283464"/>
-          </a:xfrm>
-          <a:prstGeom prst="rect">
-            <a:avLst/>
-          </a:prstGeom>
-        </p:spPr>
-      </p:pic>
-      <p:sp>
-        <p:nvSpPr>
-          <p:cNvPr id="12" name="Text 8"/>
-          <p:cNvSpPr/>
-          <p:nvPr/>
-        </p:nvSpPr>
-        <p:spPr>
-          <a:xfrm>
-            <a:off x="3666744" y="3291840"/>
-            <a:ext cx="2029968" cy="365760"/>
-          </a:xfrm>
-          <a:prstGeom prst="rect">
-            <a:avLst/>
-          </a:prstGeom>
-          <a:noFill/>
-          <a:ln/>
-        </p:spPr>
-        <p:txBody>
-          <a:bodyPr wrap="square" lIns="0" tIns="0" rIns="0" bIns="0" rtlCol="0" anchor="ctr"/>
-          <a:lstStyle/>
-          <a:p>
-            <a:pPr marL="0" indent="0">
-              <a:buNone/>
-            </a:pPr>
-            <a:r>
-              <a:rPr lang="en-US" sz="1450" b="1" dirty="0">
-                <a:solidFill>
-                  <a:srgbClr val="0B0B0C"/>
-                </a:solidFill>
-                <a:latin typeface="Georgia" pitchFamily="34" charset="0"/>
-                <a:ea typeface="Georgia" pitchFamily="34" charset="-122"/>
-                <a:cs typeface="Georgia" pitchFamily="34" charset="-120"/>
-              </a:rPr>
-              <a:t>Payments</a:t>
-            </a:r>
-            <a:endParaRPr lang="en-US" sz="1450" dirty="0"/>
-          </a:p>
-        </p:txBody>
-      </p:sp>
-      <p:sp>
-        <p:nvSpPr>
-          <p:cNvPr id="13" name="Text 9"/>
-          <p:cNvSpPr/>
-          <p:nvPr/>
-        </p:nvSpPr>
-        <p:spPr>
-          <a:xfrm>
-            <a:off x="3666744" y="3703320"/>
-            <a:ext cx="2029968" cy="1280160"/>
-          </a:xfrm>
-          <a:prstGeom prst="rect">
-            <a:avLst/>
-          </a:prstGeom>
-          <a:noFill/>
-          <a:ln/>
-        </p:spPr>
-        <p:txBody>
-          <a:bodyPr wrap="square" lIns="0" tIns="0" rIns="0" bIns="0" rtlCol="0" anchor="ctr"/>
-          <a:lstStyle/>
-          <a:p>
-            <a:pPr marL="0" indent="0">
-              <a:lnSpc>
-                <a:spcPct val="120000"/>
-              </a:lnSpc>
-              <a:buNone/>
-            </a:pPr>
-            <a:r>
-              <a:rPr lang="en-US" sz="1050" dirty="0">
-                <a:solidFill>
-                  <a:srgbClr val="6B6862"/>
-                </a:solidFill>
-                <a:latin typeface="Calibri" pitchFamily="34" charset="0"/>
-                <a:ea typeface="Calibri" pitchFamily="34" charset="-122"/>
-                <a:cs typeface="Calibri" pitchFamily="34" charset="-120"/>
-              </a:rPr>
-              <a:t>Stripe Checkout integration for secure AED transactions.</a:t>
-            </a:r>
-            <a:endParaRPr lang="en-US" sz="1050" dirty="0"/>
-          </a:p>
-        </p:txBody>
-      </p:sp>
-      <p:sp>
-        <p:nvSpPr>
-          <p:cNvPr id="14" name="Shape 10"/>
-          <p:cNvSpPr/>
-          <p:nvPr/>
-        </p:nvSpPr>
-        <p:spPr>
-          <a:xfrm>
-            <a:off x="6181344" y="2331720"/>
-            <a:ext cx="2542032" cy="2834640"/>
-          </a:xfrm>
-          <a:prstGeom prst="rect">
-            <a:avLst/>
-          </a:prstGeom>
-          <a:solidFill>
-            <a:srgbClr val="FFFFFF"/>
-          </a:solidFill>
-          <a:ln/>
-          <a:effectLst>
-            <a:outerShdw blurRad="88900" dist="25400" dir="8100000" algn="bl" rotWithShape="0">
-              <a:srgbClr val="000000">
-                <a:alpha val="10000"/>
-              </a:srgbClr>
-            </a:outerShdw>
-          </a:effectLst>
-        </p:spPr>
-      </p:sp>
-      <p:sp>
-        <p:nvSpPr>
-          <p:cNvPr id="15" name="Shape 11"/>
-          <p:cNvSpPr/>
-          <p:nvPr/>
-        </p:nvSpPr>
-        <p:spPr>
-          <a:xfrm>
-            <a:off x="6437376" y="2606040"/>
-            <a:ext cx="502920" cy="502920"/>
-          </a:xfrm>
-          <a:prstGeom prst="ellipse">
-            <a:avLst/>
-          </a:prstGeom>
-          <a:solidFill>
-            <a:srgbClr val="0B0B0C"/>
-          </a:solidFill>
-          <a:ln/>
-        </p:spPr>
-      </p:sp>
-      <p:pic>
-        <p:nvPicPr>
-          <p:cNvPr id="16" name="Image 2" descr="preencoded.png"/>
-          <p:cNvPicPr>
-            <a:picLocks noChangeAspect="1"/>
-          </p:cNvPicPr>
-          <p:nvPr/>
-        </p:nvPicPr>
-        <p:blipFill>
-          <a:blip r:embed="rId5"/>
-          <a:stretch>
-            <a:fillRect/>
-          </a:stretch>
-        </p:blipFill>
-        <p:spPr>
-          <a:xfrm>
-            <a:off x="6547104" y="2715768"/>
-            <a:ext cx="283464" cy="283464"/>
-          </a:xfrm>
-          <a:prstGeom prst="rect">
-            <a:avLst/>
-          </a:prstGeom>
-        </p:spPr>
-      </p:pic>
-      <p:sp>
-        <p:nvSpPr>
-          <p:cNvPr id="17" name="Text 12"/>
-          <p:cNvSpPr/>
-          <p:nvPr/>
-        </p:nvSpPr>
-        <p:spPr>
-          <a:xfrm>
-            <a:off x="6437376" y="3291840"/>
-            <a:ext cx="2029968" cy="365760"/>
-          </a:xfrm>
-          <a:prstGeom prst="rect">
-            <a:avLst/>
-          </a:prstGeom>
-          <a:noFill/>
-          <a:ln/>
-        </p:spPr>
-        <p:txBody>
-          <a:bodyPr wrap="square" lIns="0" tIns="0" rIns="0" bIns="0" rtlCol="0" anchor="ctr"/>
-          <a:lstStyle/>
-          <a:p>
-            <a:pPr marL="0" indent="0">
-              <a:buNone/>
-            </a:pPr>
-            <a:r>
-              <a:rPr lang="en-US" sz="1450" b="1" dirty="0">
-                <a:solidFill>
-                  <a:srgbClr val="0B0B0C"/>
-                </a:solidFill>
-                <a:latin typeface="Georgia" pitchFamily="34" charset="0"/>
-                <a:ea typeface="Georgia" pitchFamily="34" charset="-122"/>
-                <a:cs typeface="Georgia" pitchFamily="34" charset="-120"/>
-              </a:rPr>
-              <a:t>Frontend</a:t>
-            </a:r>
-            <a:endParaRPr lang="en-US" sz="1450" dirty="0"/>
-          </a:p>
-        </p:txBody>
-      </p:sp>
-      <p:sp>
-        <p:nvSpPr>
-          <p:cNvPr id="18" name="Text 13"/>
-          <p:cNvSpPr/>
-          <p:nvPr/>
-        </p:nvSpPr>
-        <p:spPr>
-          <a:xfrm>
-            <a:off x="6437376" y="3703320"/>
-            <a:ext cx="2029968" cy="1280160"/>
-          </a:xfrm>
-          <a:prstGeom prst="rect">
-            <a:avLst/>
-          </a:prstGeom>
-          <a:noFill/>
-          <a:ln/>
-        </p:spPr>
-        <p:txBody>
-          <a:bodyPr wrap="square" lIns="0" tIns="0" rIns="0" bIns="0" rtlCol="0" anchor="ctr"/>
-          <a:lstStyle/>
-          <a:p>
-            <a:pPr marL="0" indent="0">
-              <a:lnSpc>
-                <a:spcPct val="120000"/>
-              </a:lnSpc>
-              <a:buNone/>
-            </a:pPr>
-            <a:r>
-              <a:rPr lang="en-US" sz="1050" dirty="0">
-                <a:solidFill>
-                  <a:srgbClr val="6B6862"/>
-                </a:solidFill>
-                <a:latin typeface="Calibri" pitchFamily="34" charset="0"/>
-                <a:ea typeface="Calibri" pitchFamily="34" charset="-122"/>
-                <a:cs typeface="Calibri" pitchFamily="34" charset="-120"/>
-              </a:rPr>
-              <a:t>React 19 + Vite, Tailwind CSS — fast, modern, installable as a PWA.</a:t>
-            </a:r>
-            <a:endParaRPr lang="en-US" sz="1050" dirty="0"/>
-          </a:p>
-        </p:txBody>
-      </p:sp>
-      <p:sp>
-        <p:nvSpPr>
-          <p:cNvPr id="19" name="Shape 14"/>
-          <p:cNvSpPr/>
-          <p:nvPr/>
-        </p:nvSpPr>
-        <p:spPr>
-          <a:xfrm>
-            <a:off x="8951976" y="2331720"/>
-            <a:ext cx="2542032" cy="2834640"/>
-          </a:xfrm>
-          <a:prstGeom prst="rect">
-            <a:avLst/>
-          </a:prstGeom>
-          <a:solidFill>
-            <a:srgbClr val="FFFFFF"/>
-          </a:solidFill>
-          <a:ln/>
-          <a:effectLst>
-            <a:outerShdw blurRad="88900" dist="25400" dir="8100000" algn="bl" rotWithShape="0">
-              <a:srgbClr val="000000">
-                <a:alpha val="10000"/>
-              </a:srgbClr>
-            </a:outerShdw>
-          </a:effectLst>
-        </p:spPr>
-      </p:sp>
-      <p:sp>
-        <p:nvSpPr>
-          <p:cNvPr id="20" name="Shape 15"/>
-          <p:cNvSpPr/>
-          <p:nvPr/>
-        </p:nvSpPr>
-        <p:spPr>
-          <a:xfrm>
-            <a:off x="9208008" y="2606040"/>
-            <a:ext cx="502920" cy="502920"/>
-          </a:xfrm>
-          <a:prstGeom prst="ellipse">
-            <a:avLst/>
-          </a:prstGeom>
-          <a:solidFill>
-            <a:srgbClr val="0B0B0C"/>
-          </a:solidFill>
-          <a:ln/>
-        </p:spPr>
-      </p:sp>
-      <p:pic>
-        <p:nvPicPr>
-          <p:cNvPr id="21" name="Image 3" descr="preencoded.png"/>
-          <p:cNvPicPr>
-            <a:picLocks noChangeAspect="1"/>
-          </p:cNvPicPr>
-          <p:nvPr/>
-        </p:nvPicPr>
-        <p:blipFill>
-          <a:blip r:embed="rId6"/>
-          <a:stretch>
-            <a:fillRect/>
-          </a:stretch>
-        </p:blipFill>
-        <p:spPr>
-          <a:xfrm>
-            <a:off x="9317736" y="2715768"/>
-            <a:ext cx="283464" cy="283464"/>
-          </a:xfrm>
-          <a:prstGeom prst="rect">
-            <a:avLst/>
-          </a:prstGeom>
-        </p:spPr>
-      </p:pic>
-      <p:sp>
-        <p:nvSpPr>
-          <p:cNvPr id="22" name="Text 16"/>
-          <p:cNvSpPr/>
-          <p:nvPr/>
-        </p:nvSpPr>
-        <p:spPr>
-          <a:xfrm>
-            <a:off x="9208008" y="3291840"/>
-            <a:ext cx="2029968" cy="365760"/>
-          </a:xfrm>
-          <a:prstGeom prst="rect">
-            <a:avLst/>
-          </a:prstGeom>
-          <a:noFill/>
-          <a:ln/>
-        </p:spPr>
-        <p:txBody>
-          <a:bodyPr wrap="square" lIns="0" tIns="0" rIns="0" bIns="0" rtlCol="0" anchor="ctr"/>
-          <a:lstStyle/>
-          <a:p>
-            <a:pPr marL="0" indent="0">
-              <a:buNone/>
-            </a:pPr>
-            <a:r>
-              <a:rPr lang="en-US" sz="1450" b="1" dirty="0">
-                <a:solidFill>
-                  <a:srgbClr val="0B0B0C"/>
-                </a:solidFill>
-                <a:latin typeface="Georgia" pitchFamily="34" charset="0"/>
-                <a:ea typeface="Georgia" pitchFamily="34" charset="-122"/>
-                <a:cs typeface="Georgia" pitchFamily="34" charset="-120"/>
-              </a:rPr>
-              <a:t>Deployment</a:t>
-            </a:r>
-            <a:endParaRPr lang="en-US" sz="1450" dirty="0"/>
-          </a:p>
-        </p:txBody>
-      </p:sp>
-      <p:sp>
-        <p:nvSpPr>
-          <p:cNvPr id="23" name="Text 17"/>
-          <p:cNvSpPr/>
-          <p:nvPr/>
-        </p:nvSpPr>
-        <p:spPr>
-          <a:xfrm>
-            <a:off x="9208008" y="3703320"/>
-            <a:ext cx="2029968" cy="1280160"/>
-          </a:xfrm>
-          <a:prstGeom prst="rect">
-            <a:avLst/>
-          </a:prstGeom>
-          <a:noFill/>
-          <a:ln/>
-        </p:spPr>
-        <p:txBody>
-          <a:bodyPr wrap="square" lIns="0" tIns="0" rIns="0" bIns="0" rtlCol="0" anchor="ctr"/>
-          <a:lstStyle/>
-          <a:p>
-            <a:pPr marL="0" indent="0">
-              <a:lnSpc>
-                <a:spcPct val="120000"/>
-              </a:lnSpc>
-              <a:buNone/>
-            </a:pPr>
-            <a:r>
-              <a:rPr lang="en-US" sz="1050" dirty="0">
-                <a:solidFill>
-                  <a:srgbClr val="6B6862"/>
-                </a:solidFill>
-                <a:latin typeface="Calibri" pitchFamily="34" charset="0"/>
-                <a:ea typeface="Calibri" pitchFamily="34" charset="-122"/>
-                <a:cs typeface="Calibri" pitchFamily="34" charset="-120"/>
-              </a:rPr>
-              <a:t>Cloud-hosted on Railway, containerized for reliable, repeatable releases.</a:t>
-            </a:r>
-            <a:endParaRPr lang="en-US" sz="1050" dirty="0"/>
-          </a:p>
-        </p:txBody>
-      </p:sp>
-      <p:sp>
-        <p:nvSpPr>
-          <p:cNvPr id="24" name="Text 18"/>
-          <p:cNvSpPr/>
-          <p:nvPr/>
-        </p:nvSpPr>
-        <p:spPr>
-          <a:xfrm>
-            <a:off x="457200" y="6473952"/>
-            <a:ext cx="2743200" cy="274320"/>
-          </a:xfrm>
-          <a:prstGeom prst="rect">
-            <a:avLst/>
-          </a:prstGeom>
-          <a:noFill/>
-          <a:ln/>
-        </p:spPr>
-        <p:txBody>
-          <a:bodyPr wrap="square" lIns="0" tIns="0" rIns="0" bIns="0" rtlCol="0" anchor="ctr"/>
-          <a:lstStyle/>
-          <a:p>
-            <a:pPr marL="0" indent="0">
-              <a:buNone/>
-            </a:pPr>
-            <a:r>
-              <a:rPr lang="en-US" sz="900" kern="0" spc="200" dirty="0">
-                <a:solidFill>
-                  <a:srgbClr val="6B6862"/>
-                </a:solidFill>
-                <a:latin typeface="Georgia" pitchFamily="34" charset="0"/>
-                <a:ea typeface="Georgia" pitchFamily="34" charset="-122"/>
-                <a:cs typeface="Georgia" pitchFamily="34" charset="-120"/>
-              </a:rPr>
-              <a:t>CRIDORA</a:t>
-            </a:r>
-            <a:endParaRPr lang="en-US" sz="900" dirty="0"/>
-          </a:p>
-        </p:txBody>
-      </p:sp>
-      <p:sp>
-        <p:nvSpPr>
-          <p:cNvPr id="25" name="Text 19"/>
-          <p:cNvSpPr/>
-          <p:nvPr/>
-        </p:nvSpPr>
-        <p:spPr>
-          <a:xfrm>
-            <a:off x="11274552" y="6473952"/>
-            <a:ext cx="457200" cy="274320"/>
-          </a:xfrm>
-          <a:prstGeom prst="rect">
-            <a:avLst/>
-          </a:prstGeom>
-          <a:noFill/>
-          <a:ln/>
-        </p:spPr>
-        <p:txBody>
-          <a:bodyPr wrap="square" lIns="0" tIns="0" rIns="0" bIns="0" rtlCol="0" anchor="ctr"/>
-          <a:lstStyle/>
-          <a:p>
-            <a:pPr marL="0" indent="0" algn="r">
-              <a:buNone/>
-            </a:pPr>
-            <a:r>
-              <a:rPr lang="en-US" sz="900" dirty="0">
-                <a:solidFill>
-                  <a:srgbClr val="6B6862"/>
-                </a:solidFill>
-                <a:latin typeface="Calibri" pitchFamily="34" charset="0"/>
-                <a:ea typeface="Calibri" pitchFamily="34" charset="-122"/>
-                <a:cs typeface="Calibri" pitchFamily="34" charset="-120"/>
-              </a:rPr>
-              <a:t>12</a:t>
-            </a:r>
-            <a:endParaRPr lang="en-US" sz="900" dirty="0"/>
-          </a:p>
-        </p:txBody>
-      </p:sp>
-    </p:spTree>
-  </p:cSld>
-  <p:clrMapOvr>
-    <a:masterClrMapping/>
-  </p:clrMapOvr>
-</p:sld>
-</file>
-
-<file path=ppt/slides/slide13.xml><?xml version="1.0" encoding="utf-8"?>
 <p:sld xmlns:a="http://schemas.openxmlformats.org/drawingml/2006/main" xmlns:r="http://schemas.openxmlformats.org/officeDocument/2006/relationships" xmlns:p="http://schemas.openxmlformats.org/presentationml/2006/main">
   <p:cSld name="Slide 13">
     <p:bg>
@@ -7408,6 +6629,36 @@
           </a:p>
         </p:txBody>
       </p:sp>
+      <p:pic>
+        <p:nvPicPr>
+          <p:cNvPr id="8" name="Picture 7">
+            <a:extLst>
+              <a:ext uri="{FF2B5EF4-FFF2-40B4-BE49-F238E27FC236}">
+                <a16:creationId xmlns:a16="http://schemas.microsoft.com/office/drawing/2014/main" id="{58F54E19-BCF6-A5D9-24ED-9F3BC8D09A64}"/>
+              </a:ext>
+            </a:extLst>
+          </p:cNvPr>
+          <p:cNvPicPr>
+            <a:picLocks noChangeAspect="1"/>
+          </p:cNvPicPr>
+          <p:nvPr/>
+        </p:nvPicPr>
+        <p:blipFill>
+          <a:blip r:embed="rId3"/>
+          <a:stretch>
+            <a:fillRect/>
+          </a:stretch>
+        </p:blipFill>
+        <p:spPr>
+          <a:xfrm>
+            <a:off x="11131035" y="-3462"/>
+            <a:ext cx="1060965" cy="1060965"/>
+          </a:xfrm>
+          <a:prstGeom prst="rect">
+            <a:avLst/>
+          </a:prstGeom>
+        </p:spPr>
+      </p:pic>
     </p:spTree>
   </p:cSld>
   <p:clrMapOvr>
@@ -7416,7 +6667,7 @@
 </p:sld>
 </file>
 
-<file path=ppt/slides/slide14.xml><?xml version="1.0" encoding="utf-8"?>
+<file path=ppt/slides/slide13.xml><?xml version="1.0" encoding="utf-8"?>
 <p:sld xmlns:a="http://schemas.openxmlformats.org/drawingml/2006/main" xmlns:r="http://schemas.openxmlformats.org/officeDocument/2006/relationships" xmlns:p="http://schemas.openxmlformats.org/presentationml/2006/main">
   <p:cSld name="Slide 14">
     <p:bg>
@@ -7880,7 +7131,7 @@
                 <a:ea typeface="Calibri" pitchFamily="34" charset="-122"/>
                 <a:cs typeface="Calibri" pitchFamily="34" charset="-120"/>
               </a:rPr>
-              <a:t>partnerships@cridora.com  |  UAE Bullion Marketplace</a:t>
+              <a:t>www.cridora.com|  UAE Bullion Marketplace| +971568761894</a:t>
             </a:r>
             <a:endParaRPr lang="en-US" sz="1200" dirty="0"/>
           </a:p>
@@ -7964,6 +7215,36 @@
           </a:p>
         </p:txBody>
       </p:sp>
+      <p:pic>
+        <p:nvPicPr>
+          <p:cNvPr id="19" name="Picture 18">
+            <a:extLst>
+              <a:ext uri="{FF2B5EF4-FFF2-40B4-BE49-F238E27FC236}">
+                <a16:creationId xmlns:a16="http://schemas.microsoft.com/office/drawing/2014/main" id="{9AD21CCA-6C9B-E667-4555-8A4650E9C8C1}"/>
+              </a:ext>
+            </a:extLst>
+          </p:cNvPr>
+          <p:cNvPicPr>
+            <a:picLocks noChangeAspect="1"/>
+          </p:cNvPicPr>
+          <p:nvPr/>
+        </p:nvPicPr>
+        <p:blipFill>
+          <a:blip r:embed="rId3"/>
+          <a:stretch>
+            <a:fillRect/>
+          </a:stretch>
+        </p:blipFill>
+        <p:spPr>
+          <a:xfrm>
+            <a:off x="11131035" y="-3462"/>
+            <a:ext cx="1060965" cy="1060965"/>
+          </a:xfrm>
+          <a:prstGeom prst="rect">
+            <a:avLst/>
+          </a:prstGeom>
+        </p:spPr>
+      </p:pic>
     </p:spTree>
   </p:cSld>
   <p:clrMapOvr>
@@ -8778,6 +8059,36 @@
           </a:p>
         </p:txBody>
       </p:sp>
+      <p:pic>
+        <p:nvPicPr>
+          <p:cNvPr id="27" name="Picture 26">
+            <a:extLst>
+              <a:ext uri="{FF2B5EF4-FFF2-40B4-BE49-F238E27FC236}">
+                <a16:creationId xmlns:a16="http://schemas.microsoft.com/office/drawing/2014/main" id="{36AF25A3-265C-2A29-67D4-A90701200F93}"/>
+              </a:ext>
+            </a:extLst>
+          </p:cNvPr>
+          <p:cNvPicPr>
+            <a:picLocks noChangeAspect="1"/>
+          </p:cNvPicPr>
+          <p:nvPr/>
+        </p:nvPicPr>
+        <p:blipFill>
+          <a:blip r:embed="rId7"/>
+          <a:stretch>
+            <a:fillRect/>
+          </a:stretch>
+        </p:blipFill>
+        <p:spPr>
+          <a:xfrm>
+            <a:off x="11131035" y="-3462"/>
+            <a:ext cx="1060965" cy="1060965"/>
+          </a:xfrm>
+          <a:prstGeom prst="rect">
+            <a:avLst/>
+          </a:prstGeom>
+        </p:spPr>
+      </p:pic>
     </p:spTree>
   </p:cSld>
   <p:clrMapOvr>
@@ -9540,6 +8851,36 @@
           </a:p>
         </p:txBody>
       </p:sp>
+      <p:pic>
+        <p:nvPicPr>
+          <p:cNvPr id="23" name="Picture 22">
+            <a:extLst>
+              <a:ext uri="{FF2B5EF4-FFF2-40B4-BE49-F238E27FC236}">
+                <a16:creationId xmlns:a16="http://schemas.microsoft.com/office/drawing/2014/main" id="{A03FC802-E24F-F7AF-9FA8-C3EB36FFCFB0}"/>
+              </a:ext>
+            </a:extLst>
+          </p:cNvPr>
+          <p:cNvPicPr>
+            <a:picLocks noChangeAspect="1"/>
+          </p:cNvPicPr>
+          <p:nvPr/>
+        </p:nvPicPr>
+        <p:blipFill>
+          <a:blip r:embed="rId6"/>
+          <a:stretch>
+            <a:fillRect/>
+          </a:stretch>
+        </p:blipFill>
+        <p:spPr>
+          <a:xfrm>
+            <a:off x="11131035" y="-3462"/>
+            <a:ext cx="1060965" cy="1060965"/>
+          </a:xfrm>
+          <a:prstGeom prst="rect">
+            <a:avLst/>
+          </a:prstGeom>
+        </p:spPr>
+      </p:pic>
     </p:spTree>
   </p:cSld>
   <p:clrMapOvr>
@@ -11496,6 +10837,36 @@
           </a:p>
         </p:txBody>
       </p:sp>
+      <p:pic>
+        <p:nvPicPr>
+          <p:cNvPr id="63" name="Picture 62">
+            <a:extLst>
+              <a:ext uri="{FF2B5EF4-FFF2-40B4-BE49-F238E27FC236}">
+                <a16:creationId xmlns:a16="http://schemas.microsoft.com/office/drawing/2014/main" id="{1F8E959D-59B6-307D-A256-3F095B851EFA}"/>
+              </a:ext>
+            </a:extLst>
+          </p:cNvPr>
+          <p:cNvPicPr>
+            <a:picLocks noChangeAspect="1"/>
+          </p:cNvPicPr>
+          <p:nvPr/>
+        </p:nvPicPr>
+        <p:blipFill>
+          <a:blip r:embed="rId11"/>
+          <a:stretch>
+            <a:fillRect/>
+          </a:stretch>
+        </p:blipFill>
+        <p:spPr>
+          <a:xfrm>
+            <a:off x="11131035" y="-3462"/>
+            <a:ext cx="1060965" cy="1060965"/>
+          </a:xfrm>
+          <a:prstGeom prst="rect">
+            <a:avLst/>
+          </a:prstGeom>
+        </p:spPr>
+      </p:pic>
     </p:spTree>
   </p:cSld>
   <p:clrMapOvr>
@@ -12893,6 +12264,36 @@
           </a:p>
         </p:txBody>
       </p:sp>
+      <p:pic>
+        <p:nvPicPr>
+          <p:cNvPr id="41" name="Picture 40">
+            <a:extLst>
+              <a:ext uri="{FF2B5EF4-FFF2-40B4-BE49-F238E27FC236}">
+                <a16:creationId xmlns:a16="http://schemas.microsoft.com/office/drawing/2014/main" id="{9C2EC24B-50BE-2438-3401-0C84C45BE0BB}"/>
+              </a:ext>
+            </a:extLst>
+          </p:cNvPr>
+          <p:cNvPicPr>
+            <a:picLocks noChangeAspect="1"/>
+          </p:cNvPicPr>
+          <p:nvPr/>
+        </p:nvPicPr>
+        <p:blipFill>
+          <a:blip r:embed="rId7"/>
+          <a:stretch>
+            <a:fillRect/>
+          </a:stretch>
+        </p:blipFill>
+        <p:spPr>
+          <a:xfrm>
+            <a:off x="11131035" y="-3462"/>
+            <a:ext cx="1060965" cy="1060965"/>
+          </a:xfrm>
+          <a:prstGeom prst="rect">
+            <a:avLst/>
+          </a:prstGeom>
+        </p:spPr>
+      </p:pic>
     </p:spTree>
   </p:cSld>
   <p:clrMapOvr>
@@ -14089,6 +13490,36 @@
           </a:p>
         </p:txBody>
       </p:sp>
+      <p:pic>
+        <p:nvPicPr>
+          <p:cNvPr id="39" name="Picture 38">
+            <a:extLst>
+              <a:ext uri="{FF2B5EF4-FFF2-40B4-BE49-F238E27FC236}">
+                <a16:creationId xmlns:a16="http://schemas.microsoft.com/office/drawing/2014/main" id="{7B82F063-D831-9066-B29C-DABA378C608E}"/>
+              </a:ext>
+            </a:extLst>
+          </p:cNvPr>
+          <p:cNvPicPr>
+            <a:picLocks noChangeAspect="1"/>
+          </p:cNvPicPr>
+          <p:nvPr/>
+        </p:nvPicPr>
+        <p:blipFill>
+          <a:blip r:embed="rId7"/>
+          <a:stretch>
+            <a:fillRect/>
+          </a:stretch>
+        </p:blipFill>
+        <p:spPr>
+          <a:xfrm>
+            <a:off x="11131035" y="-3462"/>
+            <a:ext cx="1060965" cy="1060965"/>
+          </a:xfrm>
+          <a:prstGeom prst="rect">
+            <a:avLst/>
+          </a:prstGeom>
+        </p:spPr>
+      </p:pic>
     </p:spTree>
   </p:cSld>
   <p:clrMapOvr>
@@ -14974,6 +14405,36 @@
           </a:p>
         </p:txBody>
       </p:sp>
+      <p:pic>
+        <p:nvPicPr>
+          <p:cNvPr id="30" name="Picture 29">
+            <a:extLst>
+              <a:ext uri="{FF2B5EF4-FFF2-40B4-BE49-F238E27FC236}">
+                <a16:creationId xmlns:a16="http://schemas.microsoft.com/office/drawing/2014/main" id="{83F63444-4BFD-CD27-F70C-13CB865D7C3F}"/>
+              </a:ext>
+            </a:extLst>
+          </p:cNvPr>
+          <p:cNvPicPr>
+            <a:picLocks noChangeAspect="1"/>
+          </p:cNvPicPr>
+          <p:nvPr/>
+        </p:nvPicPr>
+        <p:blipFill>
+          <a:blip r:embed="rId4"/>
+          <a:stretch>
+            <a:fillRect/>
+          </a:stretch>
+        </p:blipFill>
+        <p:spPr>
+          <a:xfrm>
+            <a:off x="11131035" y="-3462"/>
+            <a:ext cx="1060965" cy="1060965"/>
+          </a:xfrm>
+          <a:prstGeom prst="rect">
+            <a:avLst/>
+          </a:prstGeom>
+        </p:spPr>
+      </p:pic>
     </p:spTree>
   </p:cSld>
   <p:clrMapOvr>
@@ -15938,6 +15399,36 @@
           </a:p>
         </p:txBody>
       </p:sp>
+      <p:pic>
+        <p:nvPicPr>
+          <p:cNvPr id="32" name="Picture 31">
+            <a:extLst>
+              <a:ext uri="{FF2B5EF4-FFF2-40B4-BE49-F238E27FC236}">
+                <a16:creationId xmlns:a16="http://schemas.microsoft.com/office/drawing/2014/main" id="{2C1B004C-CDD6-29E6-4BD5-2D539EED99EA}"/>
+              </a:ext>
+            </a:extLst>
+          </p:cNvPr>
+          <p:cNvPicPr>
+            <a:picLocks noChangeAspect="1"/>
+          </p:cNvPicPr>
+          <p:nvPr/>
+        </p:nvPicPr>
+        <p:blipFill>
+          <a:blip r:embed="rId8"/>
+          <a:stretch>
+            <a:fillRect/>
+          </a:stretch>
+        </p:blipFill>
+        <p:spPr>
+          <a:xfrm>
+            <a:off x="11131035" y="-3462"/>
+            <a:ext cx="1060965" cy="1060965"/>
+          </a:xfrm>
+          <a:prstGeom prst="rect">
+            <a:avLst/>
+          </a:prstGeom>
+        </p:spPr>
+      </p:pic>
     </p:spTree>
   </p:cSld>
   <p:clrMapOvr>
@@ -16758,6 +16249,36 @@
           </a:p>
         </p:txBody>
       </p:sp>
+      <p:pic>
+        <p:nvPicPr>
+          <p:cNvPr id="26" name="Picture 25">
+            <a:extLst>
+              <a:ext uri="{FF2B5EF4-FFF2-40B4-BE49-F238E27FC236}">
+                <a16:creationId xmlns:a16="http://schemas.microsoft.com/office/drawing/2014/main" id="{A1F3B118-AF50-450C-3865-80305CAC1CBC}"/>
+              </a:ext>
+            </a:extLst>
+          </p:cNvPr>
+          <p:cNvPicPr>
+            <a:picLocks noChangeAspect="1"/>
+          </p:cNvPicPr>
+          <p:nvPr/>
+        </p:nvPicPr>
+        <p:blipFill>
+          <a:blip r:embed="rId7"/>
+          <a:stretch>
+            <a:fillRect/>
+          </a:stretch>
+        </p:blipFill>
+        <p:spPr>
+          <a:xfrm>
+            <a:off x="11131035" y="-3462"/>
+            <a:ext cx="1060965" cy="1060965"/>
+          </a:xfrm>
+          <a:prstGeom prst="rect">
+            <a:avLst/>
+          </a:prstGeom>
+        </p:spPr>
+      </p:pic>
     </p:spTree>
   </p:cSld>
   <p:clrMapOvr>
